--- a/internal_doc/01.需求特性/SequoiaDB_BP(2014_4).pptx
+++ b/internal_doc/01.需求特性/SequoiaDB_BP(2014_4).pptx
@@ -2770,15 +2770,7 @@
                   <a:schemeClr val="bg1"/>
                 </a:solidFill>
               </a:rPr>
-              <a:t>季</a:t>
-            </a:r>
-            <a:r>
-              <a:rPr lang="zh-CN" altLang="en-US" sz="2400" dirty="0" smtClean="0">
-                <a:solidFill>
-                  <a:schemeClr val="bg1"/>
-                </a:solidFill>
-              </a:rPr>
-              <a:t>度</a:t>
+              <a:t>季度</a:t>
             </a:r>
             <a:endParaRPr lang="zh-CN" altLang="en-US" sz="2400" dirty="0">
               <a:solidFill>
@@ -2860,7 +2852,9 @@
           </a:xfrm>
         </p:spPr>
         <p:txBody>
-          <a:bodyPr/>
+          <a:bodyPr>
+            <a:normAutofit lnSpcReduction="10000"/>
+          </a:bodyPr>
           <a:lstStyle/>
           <a:p>
             <a:r>
@@ -2905,7 +2899,31 @@
             <a:pPr lvl="1"/>
             <a:r>
               <a:rPr lang="zh-CN" altLang="en-US" dirty="0" smtClean="0"/>
-              <a:t>轮流主持</a:t>
+              <a:t>轮流主</a:t>
+            </a:r>
+            <a:r>
+              <a:rPr lang="zh-CN" altLang="en-US" dirty="0" smtClean="0"/>
+              <a:t>持</a:t>
+            </a:r>
+            <a:endParaRPr lang="en-US" altLang="zh-CN" dirty="0" smtClean="0"/>
+          </a:p>
+          <a:p>
+            <a:pPr lvl="2"/>
+            <a:r>
+              <a:rPr lang="zh-CN" altLang="en-US" b="1" dirty="0" smtClean="0">
+                <a:solidFill>
+                  <a:srgbClr val="000099"/>
+                </a:solidFill>
+              </a:rPr>
+              <a:t>开发任务要细化到周，要及时反馈风险；出现问题和开展重构要及时沟通，确保进</a:t>
+            </a:r>
+            <a:r>
+              <a:rPr lang="zh-CN" altLang="en-US" b="1" dirty="0" smtClean="0">
+                <a:solidFill>
+                  <a:srgbClr val="000099"/>
+                </a:solidFill>
+              </a:rPr>
+              <a:t>度</a:t>
             </a:r>
             <a:endParaRPr lang="en-US" altLang="zh-CN" dirty="0" smtClean="0"/>
           </a:p>
@@ -3042,7 +3060,9 @@
           </a:xfrm>
         </p:spPr>
         <p:txBody>
-          <a:bodyPr/>
+          <a:bodyPr>
+            <a:normAutofit fontScale="92500" lnSpcReduction="20000"/>
+          </a:bodyPr>
           <a:lstStyle/>
           <a:p>
             <a:r>
@@ -3055,7 +3075,23 @@
             <a:pPr lvl="1"/>
             <a:r>
               <a:rPr lang="zh-CN" altLang="en-US" dirty="0" smtClean="0"/>
-              <a:t>原则上每月举行一次技术交流会，交流主题由各位发起</a:t>
+              <a:t>原则上</a:t>
+            </a:r>
+            <a:r>
+              <a:rPr lang="zh-CN" altLang="en-US" dirty="0" smtClean="0"/>
+              <a:t>每</a:t>
+            </a:r>
+            <a:r>
+              <a:rPr lang="en-US" altLang="zh-CN" dirty="0" smtClean="0"/>
+              <a:t>1</a:t>
+            </a:r>
+            <a:r>
+              <a:rPr lang="zh-CN" altLang="en-US" dirty="0" smtClean="0"/>
+              <a:t>个月</a:t>
+            </a:r>
+            <a:r>
+              <a:rPr lang="zh-CN" altLang="en-US" dirty="0" smtClean="0"/>
+              <a:t>举行一次技术交流会，交流主题由各位发起</a:t>
             </a:r>
             <a:endParaRPr lang="en-US" altLang="zh-CN" dirty="0" smtClean="0"/>
           </a:p>
@@ -3063,17 +3099,72 @@
             <a:pPr lvl="1"/>
             <a:r>
               <a:rPr lang="zh-CN" altLang="en-US" dirty="0" smtClean="0"/>
-              <a:t>开展培训交流讨论</a:t>
+              <a:t>开展培训交流讨</a:t>
+            </a:r>
+            <a:r>
+              <a:rPr lang="zh-CN" altLang="en-US" dirty="0" smtClean="0"/>
+              <a:t>论</a:t>
             </a:r>
             <a:endParaRPr lang="en-US" altLang="zh-CN" dirty="0" smtClean="0"/>
           </a:p>
           <a:p>
+            <a:pPr lvl="1"/>
+            <a:r>
+              <a:rPr lang="zh-CN" altLang="en-US" b="1" dirty="0" smtClean="0">
+                <a:solidFill>
+                  <a:srgbClr val="000099"/>
+                </a:solidFill>
+              </a:rPr>
+              <a:t>开展对开发人员外部使用场景的交流培训，售前人员需要总结支撑和大会报告，定期与开发人员交</a:t>
+            </a:r>
+            <a:r>
+              <a:rPr lang="zh-CN" altLang="en-US" b="1" dirty="0" smtClean="0">
+                <a:solidFill>
+                  <a:srgbClr val="000099"/>
+                </a:solidFill>
+              </a:rPr>
+              <a:t>流</a:t>
+            </a:r>
+            <a:endParaRPr lang="en-US" altLang="zh-CN" b="1" dirty="0" smtClean="0">
+              <a:solidFill>
+                <a:srgbClr val="000099"/>
+              </a:solidFill>
+            </a:endParaRPr>
+          </a:p>
+          <a:p>
+            <a:pPr lvl="1"/>
+            <a:r>
+              <a:rPr lang="zh-CN" altLang="en-US" b="1" dirty="0" smtClean="0">
+                <a:solidFill>
+                  <a:srgbClr val="000099"/>
+                </a:solidFill>
+              </a:rPr>
+              <a:t>探索和细化测试方法，开展培训交流，深化测试面，提升测试人员技能技</a:t>
+            </a:r>
+            <a:r>
+              <a:rPr lang="zh-CN" altLang="en-US" b="1" dirty="0" smtClean="0">
+                <a:solidFill>
+                  <a:srgbClr val="000099"/>
+                </a:solidFill>
+              </a:rPr>
+              <a:t>巧</a:t>
+            </a:r>
             <a:endParaRPr lang="en-US" altLang="zh-CN" dirty="0" smtClean="0"/>
           </a:p>
           <a:p>
+            <a:pPr>
+              <a:buNone/>
+            </a:pPr>
+            <a:endParaRPr lang="en-US" altLang="zh-CN" dirty="0" smtClean="0"/>
+          </a:p>
+          <a:p>
             <a:r>
               <a:rPr lang="zh-CN" altLang="en-US" dirty="0" smtClean="0"/>
-              <a:t>检视</a:t>
+              <a:t>检</a:t>
+            </a:r>
+            <a:r>
+              <a:rPr lang="zh-CN" altLang="en-US" dirty="0" smtClean="0"/>
+              <a:t>视</a:t>
             </a:r>
             <a:endParaRPr lang="en-US" altLang="zh-CN" dirty="0" smtClean="0"/>
           </a:p>
@@ -3351,11 +3442,7 @@
             </a:r>
             <a:r>
               <a:rPr lang="zh-CN" altLang="en-US" dirty="0" smtClean="0"/>
-              <a:t>季</a:t>
-            </a:r>
-            <a:r>
-              <a:rPr lang="zh-CN" altLang="en-US" dirty="0" smtClean="0"/>
-              <a:t>度总体目标</a:t>
+              <a:t>季度总体目标</a:t>
             </a:r>
             <a:endParaRPr lang="zh-CN" altLang="en-US" dirty="0"/>
           </a:p>
@@ -3459,11 +3546,7 @@
             </a:r>
             <a:r>
               <a:rPr lang="zh-CN" altLang="en-US" sz="1800" dirty="0" smtClean="0"/>
-              <a:t>：</a:t>
-            </a:r>
-            <a:r>
-              <a:rPr lang="zh-CN" altLang="en-US" sz="1800" dirty="0" smtClean="0"/>
-              <a:t>发布</a:t>
+              <a:t>：发布</a:t>
             </a:r>
             <a:r>
               <a:rPr lang="en-US" altLang="zh-CN" sz="1800" dirty="0" smtClean="0"/>
@@ -3471,11 +3554,7 @@
             </a:r>
             <a:r>
               <a:rPr lang="zh-CN" altLang="en-US" sz="1800" dirty="0" smtClean="0"/>
-              <a:t>内</a:t>
-            </a:r>
-            <a:r>
-              <a:rPr lang="zh-CN" altLang="en-US" sz="1800" dirty="0" smtClean="0"/>
-              <a:t>部测试版</a:t>
+              <a:t>内部测试版</a:t>
             </a:r>
             <a:r>
               <a:rPr lang="en-US" altLang="zh-CN" sz="1800" dirty="0" smtClean="0"/>
@@ -3499,11 +3578,7 @@
             <a:pPr lvl="1"/>
             <a:r>
               <a:rPr lang="en-US" altLang="zh-CN" sz="1800" dirty="0" smtClean="0"/>
-              <a:t>01</a:t>
-            </a:r>
-            <a:r>
-              <a:rPr lang="en-US" altLang="zh-CN" sz="1800" dirty="0" smtClean="0"/>
-              <a:t>/15</a:t>
+              <a:t>01/15</a:t>
             </a:r>
             <a:r>
               <a:rPr lang="zh-CN" altLang="en-US" sz="1800" dirty="0" smtClean="0"/>
@@ -3682,11 +3757,7 @@
             </a:r>
             <a:r>
               <a:rPr lang="zh-CN" altLang="en-US" dirty="0" smtClean="0"/>
-              <a:t>版</a:t>
-            </a:r>
-            <a:r>
-              <a:rPr lang="zh-CN" altLang="en-US" dirty="0" smtClean="0"/>
-              <a:t>本</a:t>
+              <a:t>版本</a:t>
             </a:r>
             <a:endParaRPr lang="en-US" altLang="zh-CN" dirty="0" smtClean="0"/>
           </a:p>
@@ -3702,11 +3773,7 @@
             </a:r>
             <a:r>
               <a:rPr lang="zh-CN" altLang="en-US" dirty="0" smtClean="0"/>
-              <a:t>版</a:t>
-            </a:r>
-            <a:r>
-              <a:rPr lang="zh-CN" altLang="en-US" dirty="0" smtClean="0"/>
-              <a:t>本</a:t>
+              <a:t>版本</a:t>
             </a:r>
             <a:endParaRPr lang="en-US" altLang="zh-CN" dirty="0" smtClean="0"/>
           </a:p>
@@ -3722,11 +3789,7 @@
             </a:r>
             <a:r>
               <a:rPr lang="zh-CN" altLang="en-US" dirty="0" smtClean="0"/>
-              <a:t>版</a:t>
-            </a:r>
-            <a:r>
-              <a:rPr lang="zh-CN" altLang="en-US" dirty="0" smtClean="0"/>
-              <a:t>本</a:t>
+              <a:t>版本</a:t>
             </a:r>
             <a:endParaRPr lang="zh-CN" altLang="en-US" dirty="0"/>
           </a:p>
@@ -13310,11 +13373,7 @@
             <a:pPr lvl="1"/>
             <a:r>
               <a:rPr lang="zh-CN" altLang="en-US" dirty="0" smtClean="0"/>
-              <a:t>时间</a:t>
-            </a:r>
-            <a:r>
-              <a:rPr lang="zh-CN" altLang="en-US" dirty="0" smtClean="0"/>
-              <a:t>：</a:t>
+              <a:t>时间：</a:t>
             </a:r>
             <a:r>
               <a:rPr lang="en-US" altLang="zh-CN" dirty="0" smtClean="0"/>
@@ -13322,15 +13381,7 @@
             </a:r>
             <a:r>
               <a:rPr lang="zh-CN" altLang="en-US" dirty="0" smtClean="0"/>
-              <a:t>天（</a:t>
-            </a:r>
-            <a:r>
-              <a:rPr lang="zh-CN" altLang="en-US" dirty="0" smtClean="0"/>
-              <a:t>工作日</a:t>
-            </a:r>
-            <a:r>
-              <a:rPr lang="zh-CN" altLang="en-US" dirty="0" smtClean="0"/>
-              <a:t>）</a:t>
+              <a:t>天（工作日）</a:t>
             </a:r>
             <a:endParaRPr lang="en-US" altLang="zh-CN" dirty="0" smtClean="0"/>
           </a:p>
@@ -13338,11 +13389,7 @@
             <a:pPr lvl="1"/>
             <a:r>
               <a:rPr lang="zh-CN" altLang="en-US" dirty="0" smtClean="0"/>
-              <a:t>开发</a:t>
-            </a:r>
-            <a:r>
-              <a:rPr lang="zh-CN" altLang="en-US" dirty="0" smtClean="0"/>
-              <a:t>：</a:t>
+              <a:t>开发：</a:t>
             </a:r>
             <a:r>
               <a:rPr lang="en-US" altLang="zh-CN" dirty="0" smtClean="0"/>
@@ -13379,10 +13426,6 @@
             <a:endParaRPr lang="en-US" altLang="zh-CN" dirty="0" smtClean="0"/>
           </a:p>
           <a:p>
-            <a:pPr lvl="1"/>
-            <a:endParaRPr lang="en-US" altLang="zh-CN" dirty="0" smtClean="0"/>
-          </a:p>
-          <a:p>
             <a:r>
               <a:rPr lang="zh-CN" altLang="en-US" dirty="0" smtClean="0"/>
               <a:t>开发任务人力</a:t>
@@ -13412,11 +13455,19 @@
             <a:pPr lvl="1"/>
             <a:r>
               <a:rPr lang="zh-CN" altLang="en-US" dirty="0" smtClean="0"/>
-              <a:t>问题处理：</a:t>
+              <a:t>问题处理</a:t>
+            </a:r>
+            <a:r>
+              <a:rPr lang="zh-CN" altLang="en-US" dirty="0" smtClean="0"/>
+              <a:t>：</a:t>
             </a:r>
             <a:r>
               <a:rPr lang="en-US" altLang="zh-CN" dirty="0" smtClean="0"/>
-              <a:t>40</a:t>
+              <a:t>4</a:t>
+            </a:r>
+            <a:r>
+              <a:rPr lang="en-US" altLang="zh-CN" dirty="0" smtClean="0"/>
+              <a:t>0</a:t>
             </a:r>
             <a:r>
               <a:rPr lang="zh-CN" altLang="en-US" dirty="0" smtClean="0"/>
@@ -13436,7 +13487,11 @@
             </a:r>
             <a:r>
               <a:rPr lang="zh-CN" altLang="en-US" dirty="0" smtClean="0"/>
-              <a:t>人天</a:t>
+              <a:t>人</a:t>
+            </a:r>
+            <a:r>
+              <a:rPr lang="zh-CN" altLang="en-US" dirty="0" smtClean="0"/>
+              <a:t>天</a:t>
             </a:r>
             <a:endParaRPr lang="en-US" altLang="zh-CN" dirty="0" smtClean="0"/>
           </a:p>
@@ -13444,20 +13499,40 @@
             <a:pPr lvl="1"/>
             <a:r>
               <a:rPr lang="zh-CN" altLang="en-US" dirty="0" smtClean="0"/>
-              <a:t>其它事项：</a:t>
-            </a:r>
-            <a:r>
-              <a:rPr lang="en-US" altLang="zh-CN" dirty="0" smtClean="0"/>
-              <a:t>10</a:t>
+              <a:t>培训交流：</a:t>
+            </a:r>
+            <a:r>
+              <a:rPr lang="en-US" altLang="zh-CN" b="1" dirty="0" smtClean="0">
+                <a:solidFill>
+                  <a:srgbClr val="FF0000"/>
+                </a:solidFill>
+              </a:rPr>
+              <a:t>15</a:t>
             </a:r>
             <a:r>
               <a:rPr lang="zh-CN" altLang="en-US" dirty="0" smtClean="0"/>
-              <a:t>人天</a:t>
+              <a:t>人天（不足）</a:t>
             </a:r>
             <a:endParaRPr lang="en-US" altLang="zh-CN" dirty="0" smtClean="0"/>
           </a:p>
           <a:p>
             <a:pPr lvl="1"/>
+            <a:r>
+              <a:rPr lang="zh-CN" altLang="en-US" dirty="0" smtClean="0"/>
+              <a:t>其它事项</a:t>
+            </a:r>
+            <a:r>
+              <a:rPr lang="zh-CN" altLang="en-US" dirty="0" smtClean="0"/>
+              <a:t>：</a:t>
+            </a:r>
+            <a:r>
+              <a:rPr lang="en-US" altLang="zh-CN" dirty="0" smtClean="0"/>
+              <a:t>12</a:t>
+            </a:r>
+            <a:r>
+              <a:rPr lang="zh-CN" altLang="en-US" dirty="0" smtClean="0"/>
+              <a:t>人天</a:t>
+            </a:r>
             <a:endParaRPr lang="en-US" altLang="zh-CN" dirty="0" smtClean="0"/>
           </a:p>
         </p:txBody>

--- a/internal_doc/01.需求特性/SequoiaDB_BP(2014_4).pptx
+++ b/internal_doc/01.需求特性/SequoiaDB_BP(2014_4).pptx
@@ -553,6 +553,99 @@
 </file>
 
 <file path=ppt/notesSlides/notesSlide2.xml><?xml version="1.0" encoding="utf-8"?>
+<p:notes xmlns:a="http://schemas.openxmlformats.org/drawingml/2006/main" xmlns:r="http://schemas.openxmlformats.org/officeDocument/2006/relationships" xmlns:p="http://schemas.openxmlformats.org/presentationml/2006/main">
+  <p:cSld>
+    <p:spTree>
+      <p:nvGrpSpPr>
+        <p:cNvPr id="1" name=""/>
+        <p:cNvGrpSpPr/>
+        <p:nvPr/>
+      </p:nvGrpSpPr>
+      <p:grpSpPr>
+        <a:xfrm>
+          <a:off x="0" y="0"/>
+          <a:ext cx="0" cy="0"/>
+          <a:chOff x="0" y="0"/>
+          <a:chExt cx="0" cy="0"/>
+        </a:xfrm>
+      </p:grpSpPr>
+      <p:sp>
+        <p:nvSpPr>
+          <p:cNvPr id="2" name="Slide Image Placeholder 1"/>
+          <p:cNvSpPr>
+            <a:spLocks noGrp="1" noRot="1" noChangeAspect="1"/>
+          </p:cNvSpPr>
+          <p:nvPr>
+            <p:ph type="sldImg"/>
+          </p:nvPr>
+        </p:nvSpPr>
+        <p:spPr/>
+      </p:sp>
+      <p:sp>
+        <p:nvSpPr>
+          <p:cNvPr id="3" name="Notes Placeholder 2"/>
+          <p:cNvSpPr>
+            <a:spLocks noGrp="1"/>
+          </p:cNvSpPr>
+          <p:nvPr>
+            <p:ph type="body" idx="1"/>
+          </p:nvPr>
+        </p:nvSpPr>
+        <p:spPr/>
+        <p:txBody>
+          <a:bodyPr>
+            <a:normAutofit/>
+          </a:bodyPr>
+          <a:lstStyle/>
+          <a:p>
+            <a:r>
+              <a:rPr lang="zh-CN" altLang="en-US" dirty="0" smtClean="0"/>
+              <a:t>龙阳：</a:t>
+            </a:r>
+            <a:r>
+              <a:rPr lang="zh-CN" altLang="en-US" baseline="0" dirty="0" smtClean="0"/>
+              <a:t> 负责培训需求收集和任务跟踪</a:t>
+            </a:r>
+            <a:endParaRPr lang="en-US" altLang="zh-CN" baseline="0" smtClean="0"/>
+          </a:p>
+          <a:p>
+            <a:endParaRPr lang="zh-CN" altLang="en-US"/>
+          </a:p>
+        </p:txBody>
+      </p:sp>
+      <p:sp>
+        <p:nvSpPr>
+          <p:cNvPr id="4" name="Slide Number Placeholder 3"/>
+          <p:cNvSpPr>
+            <a:spLocks noGrp="1"/>
+          </p:cNvSpPr>
+          <p:nvPr>
+            <p:ph type="sldNum" sz="quarter" idx="10"/>
+          </p:nvPr>
+        </p:nvSpPr>
+        <p:spPr/>
+        <p:txBody>
+          <a:bodyPr/>
+          <a:lstStyle/>
+          <a:p>
+            <a:fld id="{A495A556-B770-442E-91B6-DBACBAE32CFF}" type="slidenum">
+              <a:rPr lang="zh-CN" altLang="en-US" smtClean="0"/>
+              <a:pPr/>
+              <a:t>10</a:t>
+            </a:fld>
+            <a:endParaRPr lang="zh-CN" altLang="en-US"/>
+          </a:p>
+        </p:txBody>
+      </p:sp>
+    </p:spTree>
+  </p:cSld>
+  <p:clrMapOvr>
+    <a:masterClrMapping/>
+  </p:clrMapOvr>
+</p:notes>
+</file>
+
+<file path=ppt/notesSlides/notesSlide3.xml><?xml version="1.0" encoding="utf-8"?>
 <p:notes xmlns:a="http://schemas.openxmlformats.org/drawingml/2006/main" xmlns:r="http://schemas.openxmlformats.org/officeDocument/2006/relationships" xmlns:p="http://schemas.openxmlformats.org/presentationml/2006/main">
   <p:cSld>
     <p:bg>
@@ -2899,11 +2992,7 @@
             <a:pPr lvl="1"/>
             <a:r>
               <a:rPr lang="zh-CN" altLang="en-US" dirty="0" smtClean="0"/>
-              <a:t>轮流主</a:t>
-            </a:r>
-            <a:r>
-              <a:rPr lang="zh-CN" altLang="en-US" dirty="0" smtClean="0"/>
-              <a:t>持</a:t>
+              <a:t>轮流主持</a:t>
             </a:r>
             <a:endParaRPr lang="en-US" altLang="zh-CN" dirty="0" smtClean="0"/>
           </a:p>
@@ -2915,15 +3004,7 @@
                   <a:srgbClr val="000099"/>
                 </a:solidFill>
               </a:rPr>
-              <a:t>开发任务要细化到周，要及时反馈风险；出现问题和开展重构要及时沟通，确保进</a:t>
-            </a:r>
-            <a:r>
-              <a:rPr lang="zh-CN" altLang="en-US" b="1" dirty="0" smtClean="0">
-                <a:solidFill>
-                  <a:srgbClr val="000099"/>
-                </a:solidFill>
-              </a:rPr>
-              <a:t>度</a:t>
+              <a:t>开发任务要细化到周，要及时反馈风险；出现问题和开展重构要及时沟通，确保进度</a:t>
             </a:r>
             <a:endParaRPr lang="en-US" altLang="zh-CN" dirty="0" smtClean="0"/>
           </a:p>
@@ -3075,11 +3156,7 @@
             <a:pPr lvl="1"/>
             <a:r>
               <a:rPr lang="zh-CN" altLang="en-US" dirty="0" smtClean="0"/>
-              <a:t>原则上</a:t>
-            </a:r>
-            <a:r>
-              <a:rPr lang="zh-CN" altLang="en-US" dirty="0" smtClean="0"/>
-              <a:t>每</a:t>
+              <a:t>原则上每</a:t>
             </a:r>
             <a:r>
               <a:rPr lang="en-US" altLang="zh-CN" dirty="0" smtClean="0"/>
@@ -3087,11 +3164,7 @@
             </a:r>
             <a:r>
               <a:rPr lang="zh-CN" altLang="en-US" dirty="0" smtClean="0"/>
-              <a:t>个月</a:t>
-            </a:r>
-            <a:r>
-              <a:rPr lang="zh-CN" altLang="en-US" dirty="0" smtClean="0"/>
-              <a:t>举行一次技术交流会，交流主题由各位发起</a:t>
+              <a:t>个月举行一次技术交流会，交流主题由各位发起</a:t>
             </a:r>
             <a:endParaRPr lang="en-US" altLang="zh-CN" dirty="0" smtClean="0"/>
           </a:p>
@@ -3099,11 +3172,7 @@
             <a:pPr lvl="1"/>
             <a:r>
               <a:rPr lang="zh-CN" altLang="en-US" dirty="0" smtClean="0"/>
-              <a:t>开展培训交流讨</a:t>
-            </a:r>
-            <a:r>
-              <a:rPr lang="zh-CN" altLang="en-US" dirty="0" smtClean="0"/>
-              <a:t>论</a:t>
+              <a:t>开展培训交流讨论</a:t>
             </a:r>
             <a:endParaRPr lang="en-US" altLang="zh-CN" dirty="0" smtClean="0"/>
           </a:p>
@@ -3115,15 +3184,7 @@
                   <a:srgbClr val="000099"/>
                 </a:solidFill>
               </a:rPr>
-              <a:t>开展对开发人员外部使用场景的交流培训，售前人员需要总结支撑和大会报告，定期与开发人员交</a:t>
-            </a:r>
-            <a:r>
-              <a:rPr lang="zh-CN" altLang="en-US" b="1" dirty="0" smtClean="0">
-                <a:solidFill>
-                  <a:srgbClr val="000099"/>
-                </a:solidFill>
-              </a:rPr>
-              <a:t>流</a:t>
+              <a:t>开展对开发人员外部使用场景的交流培训，售前人员需要总结支撑和大会报告，定期与开发人员交流</a:t>
             </a:r>
             <a:endParaRPr lang="en-US" altLang="zh-CN" b="1" dirty="0" smtClean="0">
               <a:solidFill>
@@ -3139,15 +3200,7 @@
                   <a:srgbClr val="000099"/>
                 </a:solidFill>
               </a:rPr>
-              <a:t>探索和细化测试方法，开展培训交流，深化测试面，提升测试人员技能技</a:t>
-            </a:r>
-            <a:r>
-              <a:rPr lang="zh-CN" altLang="en-US" b="1" dirty="0" smtClean="0">
-                <a:solidFill>
-                  <a:srgbClr val="000099"/>
-                </a:solidFill>
-              </a:rPr>
-              <a:t>巧</a:t>
+              <a:t>探索和细化测试方法，开展培训交流，深化测试面，提升测试人员技能技巧</a:t>
             </a:r>
             <a:endParaRPr lang="en-US" altLang="zh-CN" dirty="0" smtClean="0"/>
           </a:p>
@@ -3160,11 +3213,7 @@
           <a:p>
             <a:r>
               <a:rPr lang="zh-CN" altLang="en-US" dirty="0" smtClean="0"/>
-              <a:t>检</a:t>
-            </a:r>
-            <a:r>
-              <a:rPr lang="zh-CN" altLang="en-US" dirty="0" smtClean="0"/>
-              <a:t>视</a:t>
+              <a:t>检视</a:t>
             </a:r>
             <a:endParaRPr lang="en-US" altLang="zh-CN" dirty="0" smtClean="0"/>
           </a:p>
@@ -13455,19 +13504,11 @@
             <a:pPr lvl="1"/>
             <a:r>
               <a:rPr lang="zh-CN" altLang="en-US" dirty="0" smtClean="0"/>
-              <a:t>问题处理</a:t>
-            </a:r>
-            <a:r>
-              <a:rPr lang="zh-CN" altLang="en-US" dirty="0" smtClean="0"/>
-              <a:t>：</a:t>
+              <a:t>问题处理：</a:t>
             </a:r>
             <a:r>
               <a:rPr lang="en-US" altLang="zh-CN" dirty="0" smtClean="0"/>
-              <a:t>4</a:t>
-            </a:r>
-            <a:r>
-              <a:rPr lang="en-US" altLang="zh-CN" dirty="0" smtClean="0"/>
-              <a:t>0</a:t>
+              <a:t>40</a:t>
             </a:r>
             <a:r>
               <a:rPr lang="zh-CN" altLang="en-US" dirty="0" smtClean="0"/>
@@ -13487,11 +13528,7 @@
             </a:r>
             <a:r>
               <a:rPr lang="zh-CN" altLang="en-US" dirty="0" smtClean="0"/>
-              <a:t>人</a:t>
-            </a:r>
-            <a:r>
-              <a:rPr lang="zh-CN" altLang="en-US" dirty="0" smtClean="0"/>
-              <a:t>天</a:t>
+              <a:t>人天</a:t>
             </a:r>
             <a:endParaRPr lang="en-US" altLang="zh-CN" dirty="0" smtClean="0"/>
           </a:p>
@@ -13519,11 +13556,7 @@
             <a:pPr lvl="1"/>
             <a:r>
               <a:rPr lang="zh-CN" altLang="en-US" dirty="0" smtClean="0"/>
-              <a:t>其它事项</a:t>
-            </a:r>
-            <a:r>
-              <a:rPr lang="zh-CN" altLang="en-US" dirty="0" smtClean="0"/>
-              <a:t>：</a:t>
+              <a:t>其它事项：</a:t>
             </a:r>
             <a:r>
               <a:rPr lang="en-US" altLang="zh-CN" dirty="0" smtClean="0"/>
